--- a/docs/tcc/poster/Poster_Psike_TCC.pptx
+++ b/docs/tcc/poster/Poster_Psike_TCC.pptx
@@ -3079,14 +3079,14 @@
             <a:pPr algn="just"/>
             <a:r>
               <a:rPr lang="pt-BR" sz="3200" dirty="0" err="1"/>
-              <a:t>No setor elétrico a gravidade é extrema: 2.089 acidentes de origem elétrica no Brasil em 2023, com 781 óbitos (ABRACOPEL, 2024); 250 mortes envolvendo a rede de distribuição (ABRADEE, 2024). Cada ocorrência — e cada quase acidente — é aprendizado que não pode ser desperdiçado.</a:t>
+              <a:t>No setor elétrico a gravidade é extrema: 2.089 acidentes de origem elétrica no Brasil em 2023, com 781 óbitos (Abracopel, 2024); 250 mortes envolvendo a rede de distribuição (Acidentes [...], 2024). Cada ocorrência — e cada quase acidente — é aprendizado que não pode ser desperdiçado.</a:t>
             </a:r>
           </a:p>
           <a:p>
             <a:pPr algn="just"/>
             <a:r>
               <a:rPr lang="pt-BR" sz="3200" dirty="0" err="1"/>
-              <a:t>A literatura brasileira consolidou o método da árvore de causas como antídoto à investigação culpabilizadora, revelando os fatores gerenciais e organizacionais na gênese dos acidentes (BINDER; ALMEIDA, 1997).</a:t>
+              <a:t>A literatura brasileira consolidou o método da árvore de causas como antídoto à investigação culpabilizadora, revelando os fatores gerenciais e organizacionais na gênese dos acidentes (Binder; Almeida, 1997).</a:t>
             </a:r>
           </a:p>
           <a:p>
@@ -3138,21 +3138,42 @@
             </a:r>
           </a:p>
           <a:p>
+            <a:endParaRPr lang="pt-BR" sz="3200" dirty="0"/>
+          </a:p>
+          <a:p>
+            <a:endParaRPr lang="pt-BR" sz="3200" dirty="0"/>
+          </a:p>
+          <a:p>
+            <a:endParaRPr lang="pt-BR" sz="3200" dirty="0"/>
+          </a:p>
+          <a:p>
+            <a:endParaRPr lang="pt-BR" sz="3200" dirty="0"/>
+          </a:p>
+          <a:p>
+            <a:endParaRPr lang="pt-BR" sz="3200" dirty="0"/>
+          </a:p>
+          <a:p>
+            <a:endParaRPr lang="pt-BR" sz="3200" dirty="0"/>
+          </a:p>
+          <a:p>
+            <a:endParaRPr lang="pt-BR" sz="3200" dirty="0"/>
+          </a:p>
+          <a:p>
+            <a:endParaRPr lang="pt-BR" sz="3200" dirty="0"/>
+          </a:p>
+          <a:p>
+            <a:endParaRPr lang="pt-BR" sz="3200" dirty="0"/>
+          </a:p>
+          <a:p>
+            <a:endParaRPr lang="pt-BR" sz="3200" dirty="0"/>
+          </a:p>
+          <a:p>
+            <a:endParaRPr lang="pt-BR" sz="3200" dirty="0"/>
+          </a:p>
+          <a:p>
             <a:r>
               <a:rPr lang="pt-BR" sz="3200" dirty="0" err="1"/>
-              <a:t>Organização do setor de distribuição de energia elétrica, preservada em anonimato. Parte documental: [PREENCHER: número] ocorrências históricas anonimizadas reinvestigadas com o roteiro de 3 níveis, comparando a profundidade causal com a análise original.</a:t>
-            </a:r>
-          </a:p>
-          <a:p>
-            <a:r>
-              <a:rPr lang="pt-BR" sz="3200" dirty="0" err="1"/>
-              <a:t>Parte de campo: piloto no período de [PREENCHER: período], com as equipes de [PREENCHER: escopo] registrando novas ocorrências e condições inseguras no local, pelo celular.</a:t>
-            </a:r>
-          </a:p>
-          <a:p>
-            <a:r>
-              <a:rPr lang="pt-BR" sz="3200" dirty="0" err="1"/>
-              <a:t>Nenhum caso identifica pessoas, datas exatas ou locais; os exemplos são descritos com função genérica e circunstâncias descaracterizadas.</a:t>
+              <a:t>Organização de distribuição de energia elétrica, preservada em anonimato. Parte documental: [PREENCHER: nº] ocorrências históricas anonimizadas reinvestigadas em 3 níveis. Parte de campo: piloto em [PREENCHER: período] com as equipes de [PREENCHER: escopo], registrando ocorrências pelo celular.</a:t>
             </a:r>
           </a:p>
         </p:txBody>
@@ -3267,21 +3288,42 @@
             </a:r>
           </a:p>
           <a:p>
+            <a:endParaRPr lang="pt-BR" sz="3200" dirty="0"/>
+          </a:p>
+          <a:p>
+            <a:endParaRPr lang="pt-BR" sz="3200" dirty="0"/>
+          </a:p>
+          <a:p>
+            <a:endParaRPr lang="pt-BR" sz="3200" dirty="0"/>
+          </a:p>
+          <a:p>
+            <a:endParaRPr lang="pt-BR" sz="3200" dirty="0"/>
+          </a:p>
+          <a:p>
+            <a:endParaRPr lang="pt-BR" sz="3200" dirty="0"/>
+          </a:p>
+          <a:p>
+            <a:endParaRPr lang="pt-BR" sz="3200" dirty="0"/>
+          </a:p>
+          <a:p>
+            <a:endParaRPr lang="pt-BR" sz="3200" dirty="0"/>
+          </a:p>
+          <a:p>
+            <a:endParaRPr lang="pt-BR" sz="3200" dirty="0"/>
+          </a:p>
+          <a:p>
+            <a:endParaRPr lang="pt-BR" sz="3200" dirty="0"/>
+          </a:p>
+          <a:p>
+            <a:endParaRPr lang="pt-BR" sz="3200" dirty="0"/>
+          </a:p>
+          <a:p>
+            <a:endParaRPr lang="pt-BR" sz="3200" dirty="0"/>
+          </a:p>
+          <a:p>
             <a:r>
               <a:rPr lang="pt-BR" sz="3200" dirty="0" err="1"/>
-              <a:t>O sistema foi implementado integralmente e está operacional: registro no local, investigação em 3 níveis, ações e indicadores atualizados sem transcrição manual, a custo de operação nulo.</a:t>
-            </a:r>
-          </a:p>
-          <a:p>
-            <a:r>
-              <a:rPr lang="pt-BR" sz="3200" dirty="0" err="1"/>
-              <a:t>[PREENCHER: inserir resultados reais — distribuição de causas por nível (análise original × estruturada), volume de quase acidentes reportados no piloto, razão QA/acidentes e tempo evento–registro. Substituir as figuras pelo gráfico do painel e telas do módulo.]</a:t>
-            </a:r>
-          </a:p>
-          <a:p>
-            <a:r>
-              <a:rPr lang="pt-BR" sz="3200" dirty="0" err="1"/>
-              <a:t>Discussão: quando o instrumento obriga a progressão até as causas básicas, a investigação alcança os fatores organizacionais que a análise tradicional não vê (BINDER; ALMEIDA, 1997; REASON, 1997) — e o reporte fácil de quase acidentes captura a base da pirâmide de eventos que antecede a lesão grave (HEINRICH, 1931; BIRD; GERMAIN, 1985).</a:t>
+              <a:t>Sistema operacional, sem transcrição manual e com custo nulo. [PREENCHER: principal resultado documental e do piloto.] Ao exigir as causas básicas, a investigação alcança os fatores organizacionais que a análise tradicional não vê (Binder; Almeida, 1997; Reason, 1997).</a:t>
             </a:r>
           </a:p>
         </p:txBody>
@@ -3384,28 +3426,28 @@
             <a:pPr algn="just"/>
             <a:r>
               <a:rPr lang="pt-BR" sz="2800" dirty="0" err="1"/>
-              <a:t>ABRACOPEL. Anuário Estatístico de Acidentes de Origem Elétrica 2024 (ano-base 2023). Salto, 2024.</a:t>
+              <a:t>ABRACOPEL. Anuário estatístico de acidentes de origem elétrica 2024: ano base 2023. Abracopel, 2024.</a:t>
             </a:r>
           </a:p>
           <a:p>
             <a:pPr algn="just"/>
             <a:r>
               <a:rPr lang="pt-BR" sz="2800" dirty="0" err="1"/>
-              <a:t>BINDER, M. C. P.; ALMEIDA, I. M. Estudo de caso de dois acidentes do trabalho investigados com o método de árvore de causas. Cad. Saúde Pública, v. 13, n. 4, 1997.</a:t>
+              <a:t>BINDER, M. C. P.; ALMEIDA, I. M. Estudo de caso de dois acidentes do trabalho investigados com o método de árvore de causas. Cadernos de Saúde Pública, v. 13, n. 4, p. 749-760, 1997.</a:t>
             </a:r>
           </a:p>
           <a:p>
             <a:pPr algn="just"/>
             <a:r>
               <a:rPr lang="pt-BR" sz="2800" dirty="0" err="1"/>
-              <a:t>BRASIL. NR-1 — Gerenciamento de riscos ocupacionais (Portaria MTE nº 1.419/2024).</a:t>
+              <a:t>BRASIL. MTE. NR-1: gerenciamento de riscos ocupacionais. Portaria MTE nº 1.419/2024.</a:t>
             </a:r>
           </a:p>
           <a:p>
             <a:pPr algn="just"/>
             <a:r>
               <a:rPr lang="pt-BR" sz="2800" dirty="0" err="1"/>
-              <a:t>ABNT. NBR 14280:2001 — Cadastro de acidente do trabalho.</a:t>
+              <a:t>ABNT. NBR 14280: cadastro de acidente do trabalho. Rio de Janeiro, 2001.</a:t>
             </a:r>
           </a:p>
           <a:p>
@@ -3454,212 +3496,26 @@
           <a:p>
             <a:pPr algn="ctr"/>
             <a:r>
-              <a:rPr lang="pt-BR" sz="6600" dirty="0"/>
-              <a:t>SISTEMA DIGITAL DE INVESTIGAÇÃO DE ACIDENTES PELA ÁRVORE DE CAUSAS: registro de ocorrências integrado à NR-1 na distribuição de energia elétrica</a:t>
+              <a:rPr lang="pt-BR" sz="3600" dirty="0"/>
+              <a:t>INVESTIGAÇÃO DIGITAL DE ACIDENTES PELA ÁRVORE DE CAUSAS NA DISTRIBUIÇÃO DE ENERGIA ELÉTRICA</a:t>
             </a:r>
           </a:p>
           <a:p>
             <a:pPr algn="ctr"/>
             <a:r>
-              <a:rPr lang="pt-BR" sz="5400" dirty="0"/>
+              <a:rPr lang="pt-BR" sz="2800" dirty="0"/>
               <a:t>Rodrigo Zambon [PREENCHER: nome completo]</a:t>
             </a:r>
           </a:p>
           <a:p>
             <a:pPr algn="ctr"/>
             <a:r>
-              <a:rPr lang="pt-BR" sz="5400" dirty="0"/>
-              <a:t>[PREENCHER: e-mail]  ·  Supervisão: [PREENCHER: nome]  ·  Apoio: CERPRO</a:t>
-            </a:r>
-          </a:p>
-        </p:txBody>
-      </p:sp>
-      <p:pic>
-        <p:nvPicPr>
-          <p:cNvPr id="1026" name="Picture 2" descr="Qué es un gráfico de líneas - Todo lo que necesitas saber">
-            <a:extLst>
-              <a:ext uri="{FF2B5EF4-FFF2-40B4-BE49-F238E27FC236}">
-                <a16:creationId xmlns:a16="http://schemas.microsoft.com/office/drawing/2014/main" id="{03575FE9-9B75-B4CE-9D7E-169DCBA458BB}"/>
-              </a:ext>
-            </a:extLst>
-          </p:cNvPr>
-          <p:cNvPicPr>
-            <a:picLocks noChangeAspect="1" noChangeArrowheads="1"/>
-          </p:cNvPicPr>
-          <p:nvPr/>
-        </p:nvPicPr>
-        <p:blipFill rotWithShape="1">
-          <a:blip r:embed="rId2">
-            <a:extLst>
-              <a:ext uri="{28A0092B-C50C-407E-A947-70E740481C1C}">
-                <a14:useLocalDpi xmlns:a14="http://schemas.microsoft.com/office/drawing/2010/main" val="0"/>
-              </a:ext>
-            </a:extLst>
-          </a:blip>
-          <a:srcRect t="18566" b="11708"/>
-          <a:stretch/>
-        </p:blipFill>
-        <p:spPr bwMode="auto">
-          <a:xfrm>
-            <a:off x="17239748" y="16926891"/>
-            <a:ext cx="5768641" cy="4060105"/>
-          </a:xfrm>
-          <a:prstGeom prst="rect">
-            <a:avLst/>
-          </a:prstGeom>
-          <a:noFill/>
-          <a:extLst>
-            <a:ext uri="{909E8E84-426E-40DD-AFC4-6F175D3DCCD1}">
-              <a14:hiddenFill xmlns:a14="http://schemas.microsoft.com/office/drawing/2010/main">
-                <a:solidFill>
-                  <a:srgbClr val="FFFFFF"/>
-                </a:solidFill>
-              </a14:hiddenFill>
-            </a:ext>
-          </a:extLst>
-        </p:spPr>
-      </p:pic>
-      <p:pic>
-        <p:nvPicPr>
-          <p:cNvPr id="1028" name="Picture 4" descr="Modelo de gráfico de linhas - Venngage">
-            <a:extLst>
-              <a:ext uri="{FF2B5EF4-FFF2-40B4-BE49-F238E27FC236}">
-                <a16:creationId xmlns:a16="http://schemas.microsoft.com/office/drawing/2014/main" id="{F8A11072-674F-7D28-E08D-329EC42B5585}"/>
-              </a:ext>
-            </a:extLst>
-          </p:cNvPr>
-          <p:cNvPicPr>
-            <a:picLocks noChangeAspect="1" noChangeArrowheads="1"/>
-          </p:cNvPicPr>
-          <p:nvPr/>
-        </p:nvPicPr>
-        <p:blipFill>
-          <a:blip r:embed="rId3">
-            <a:extLst>
-              <a:ext uri="{28A0092B-C50C-407E-A947-70E740481C1C}">
-                <a14:useLocalDpi xmlns:a14="http://schemas.microsoft.com/office/drawing/2010/main" val="0"/>
-              </a:ext>
-            </a:extLst>
-          </a:blip>
-          <a:srcRect/>
-          <a:stretch>
-            <a:fillRect/>
-          </a:stretch>
-        </p:blipFill>
-        <p:spPr bwMode="auto">
-          <a:xfrm>
-            <a:off x="24995633" y="16926891"/>
-            <a:ext cx="5768641" cy="4060106"/>
-          </a:xfrm>
-          <a:prstGeom prst="rect">
-            <a:avLst/>
-          </a:prstGeom>
-          <a:noFill/>
-          <a:extLst>
-            <a:ext uri="{909E8E84-426E-40DD-AFC4-6F175D3DCCD1}">
-              <a14:hiddenFill xmlns:a14="http://schemas.microsoft.com/office/drawing/2010/main">
-                <a:solidFill>
-                  <a:srgbClr val="FFFFFF"/>
-                </a:solidFill>
-              </a14:hiddenFill>
-            </a:ext>
-          </a:extLst>
-        </p:spPr>
-      </p:pic>
-      <p:pic>
-        <p:nvPicPr>
-          <p:cNvPr id="1030" name="Picture 6" descr="A essência da qualidade na produção - LCM Treinamento">
-            <a:extLst>
-              <a:ext uri="{FF2B5EF4-FFF2-40B4-BE49-F238E27FC236}">
-                <a16:creationId xmlns:a16="http://schemas.microsoft.com/office/drawing/2014/main" id="{73DAB86F-3BD6-163E-A859-D7EAF22CAD5E}"/>
-              </a:ext>
-            </a:extLst>
-          </p:cNvPr>
-          <p:cNvPicPr>
-            <a:picLocks noChangeAspect="1" noChangeArrowheads="1"/>
-          </p:cNvPicPr>
-          <p:nvPr/>
-        </p:nvPicPr>
-        <p:blipFill>
-          <a:blip r:embed="rId4">
-            <a:extLst>
-              <a:ext uri="{28A0092B-C50C-407E-A947-70E740481C1C}">
-                <a14:useLocalDpi xmlns:a14="http://schemas.microsoft.com/office/drawing/2010/main" val="0"/>
-              </a:ext>
-            </a:extLst>
-          </a:blip>
-          <a:srcRect/>
-          <a:stretch>
-            <a:fillRect/>
-          </a:stretch>
-        </p:blipFill>
-        <p:spPr bwMode="auto">
-          <a:xfrm>
-            <a:off x="17070701" y="6328676"/>
-            <a:ext cx="7620000" cy="4286250"/>
-          </a:xfrm>
-          <a:prstGeom prst="rect">
-            <a:avLst/>
-          </a:prstGeom>
-          <a:noFill/>
-          <a:extLst>
-            <a:ext uri="{909E8E84-426E-40DD-AFC4-6F175D3DCCD1}">
-              <a14:hiddenFill xmlns:a14="http://schemas.microsoft.com/office/drawing/2010/main">
-                <a:solidFill>
-                  <a:srgbClr val="FFFFFF"/>
-                </a:solidFill>
-              </a14:hiddenFill>
-            </a:ext>
-          </a:extLst>
-        </p:spPr>
-      </p:pic>
-      <p:pic>
-        <p:nvPicPr>
-          <p:cNvPr id="1032" name="Picture 8" descr="Prorrogadas inscrições para especialização em Gestão da Produção">
-            <a:extLst>
-              <a:ext uri="{FF2B5EF4-FFF2-40B4-BE49-F238E27FC236}">
-                <a16:creationId xmlns:a16="http://schemas.microsoft.com/office/drawing/2014/main" id="{CE6B207C-B896-5AD1-7C86-82608F522B83}"/>
-              </a:ext>
-            </a:extLst>
-          </p:cNvPr>
-          <p:cNvPicPr>
-            <a:picLocks noChangeAspect="1" noChangeArrowheads="1"/>
-          </p:cNvPicPr>
-          <p:nvPr/>
-        </p:nvPicPr>
-        <p:blipFill>
-          <a:blip r:embed="rId5">
-            <a:extLst>
-              <a:ext uri="{28A0092B-C50C-407E-A947-70E740481C1C}">
-                <a14:useLocalDpi xmlns:a14="http://schemas.microsoft.com/office/drawing/2010/main" val="0"/>
-              </a:ext>
-            </a:extLst>
-          </a:blip>
-          <a:srcRect/>
-          <a:stretch>
-            <a:fillRect/>
-          </a:stretch>
-        </p:blipFill>
-        <p:spPr bwMode="auto">
-          <a:xfrm>
-            <a:off x="24883185" y="6328677"/>
-            <a:ext cx="5993535" cy="4286250"/>
-          </a:xfrm>
-          <a:prstGeom prst="rect">
-            <a:avLst/>
-          </a:prstGeom>
-          <a:noFill/>
-          <a:extLst>
-            <a:ext uri="{909E8E84-426E-40DD-AFC4-6F175D3DCCD1}">
-              <a14:hiddenFill xmlns:a14="http://schemas.microsoft.com/office/drawing/2010/main">
-                <a:solidFill>
-                  <a:srgbClr val="FFFFFF"/>
-                </a:solidFill>
-              </a14:hiddenFill>
-            </a:ext>
-          </a:extLst>
-        </p:spPr>
-      </p:pic>
+              <a:rPr lang="pt-BR" sz="2400" dirty="0"/>
+              <a:t>[PREENCHER: e-mail]  ·  Apoio: CERPRO</a:t>
+            </a:r>
+          </a:p>
+        </p:txBody>
+      </p:sp>
       <p:pic>
         <p:nvPicPr>
           <p:cNvPr id="7" name="Imagem 6" descr="Logotipo, nome da empresa&#10;&#10;Descrição gerada automaticamente">
@@ -3726,6 +3582,271 @@
           </a:prstGeom>
         </p:spPr>
       </p:pic>
+      <p:sp>
+        <p:nvSpPr>
+          <p:cNvPr id="1033" name="Rectangle 1032"/>
+          <p:cNvSpPr/>
+          <p:nvPr/>
+        </p:nvSpPr>
+        <p:spPr>
+          <a:xfrm>
+            <a:off x="827999" y="14760000"/>
+            <a:ext cx="14400000" cy="5040000"/>
+          </a:xfrm>
+          <a:prstGeom prst="rect">
+            <a:avLst/>
+          </a:prstGeom>
+          <a:solidFill>
+            <a:srgbClr val="FFF2A8"/>
+          </a:solidFill>
+          <a:ln w="38100">
+            <a:solidFill>
+              <a:srgbClr val="B4842A"/>
+            </a:solidFill>
+          </a:ln>
+        </p:spPr>
+        <p:style>
+          <a:lnRef idx="1">
+            <a:schemeClr val="accent1"/>
+          </a:lnRef>
+          <a:fillRef idx="3">
+            <a:schemeClr val="accent1"/>
+          </a:fillRef>
+          <a:effectRef idx="2">
+            <a:schemeClr val="accent1"/>
+          </a:effectRef>
+          <a:fontRef idx="minor">
+            <a:schemeClr val="lt1"/>
+          </a:fontRef>
+        </p:style>
+        <p:txBody>
+          <a:bodyPr rtlCol="0" anchor="ctr" wrap="square"/>
+          <a:lstStyle/>
+          <a:p>
+            <a:pPr algn="ctr"/>
+            <a:r>
+              <a:rPr sz="2800" b="1">
+                <a:solidFill>
+                  <a:srgbClr val="16233F"/>
+                </a:solidFill>
+              </a:rPr>
+              <a:t>[PREENCHER: FIGURA do método — exemplo de árvore de causas ou fluxo registro → 3 níveis de causas → ações]</a:t>
+            </a:r>
+          </a:p>
+        </p:txBody>
+      </p:sp>
+      <p:sp>
+        <p:nvSpPr>
+          <p:cNvPr id="1034" name="Rectangle 1033"/>
+          <p:cNvSpPr/>
+          <p:nvPr/>
+        </p:nvSpPr>
+        <p:spPr>
+          <a:xfrm>
+            <a:off x="17070701" y="6328676"/>
+            <a:ext cx="7620000" cy="4286250"/>
+          </a:xfrm>
+          <a:prstGeom prst="rect">
+            <a:avLst/>
+          </a:prstGeom>
+          <a:solidFill>
+            <a:srgbClr val="FFF2A8"/>
+          </a:solidFill>
+          <a:ln w="38100">
+            <a:solidFill>
+              <a:srgbClr val="B4842A"/>
+            </a:solidFill>
+          </a:ln>
+        </p:spPr>
+        <p:style>
+          <a:lnRef idx="1">
+            <a:schemeClr val="accent1"/>
+          </a:lnRef>
+          <a:fillRef idx="3">
+            <a:schemeClr val="accent1"/>
+          </a:fillRef>
+          <a:effectRef idx="2">
+            <a:schemeClr val="accent1"/>
+          </a:effectRef>
+          <a:fontRef idx="minor">
+            <a:schemeClr val="lt1"/>
+          </a:fontRef>
+        </p:style>
+        <p:txBody>
+          <a:bodyPr rtlCol="0" anchor="ctr" wrap="square"/>
+          <a:lstStyle/>
+          <a:p>
+            <a:pPr algn="ctr"/>
+            <a:r>
+              <a:rPr sz="2800" b="1">
+                <a:solidFill>
+                  <a:srgbClr val="16233F"/>
+                </a:solidFill>
+              </a:rPr>
+              <a:t>[PREENCHER: FOTO 1 do estudo de caso — rostos e logotipos ocultados]</a:t>
+            </a:r>
+          </a:p>
+        </p:txBody>
+      </p:sp>
+      <p:sp>
+        <p:nvSpPr>
+          <p:cNvPr id="1035" name="Rectangle 1034"/>
+          <p:cNvSpPr/>
+          <p:nvPr/>
+        </p:nvSpPr>
+        <p:spPr>
+          <a:xfrm>
+            <a:off x="24883185" y="6328677"/>
+            <a:ext cx="5993535" cy="4286250"/>
+          </a:xfrm>
+          <a:prstGeom prst="rect">
+            <a:avLst/>
+          </a:prstGeom>
+          <a:solidFill>
+            <a:srgbClr val="FFF2A8"/>
+          </a:solidFill>
+          <a:ln w="38100">
+            <a:solidFill>
+              <a:srgbClr val="B4842A"/>
+            </a:solidFill>
+          </a:ln>
+        </p:spPr>
+        <p:style>
+          <a:lnRef idx="1">
+            <a:schemeClr val="accent1"/>
+          </a:lnRef>
+          <a:fillRef idx="3">
+            <a:schemeClr val="accent1"/>
+          </a:fillRef>
+          <a:effectRef idx="2">
+            <a:schemeClr val="accent1"/>
+          </a:effectRef>
+          <a:fontRef idx="minor">
+            <a:schemeClr val="lt1"/>
+          </a:fontRef>
+        </p:style>
+        <p:txBody>
+          <a:bodyPr rtlCol="0" anchor="ctr" wrap="square"/>
+          <a:lstStyle/>
+          <a:p>
+            <a:pPr algn="ctr"/>
+            <a:r>
+              <a:rPr sz="2800" b="1">
+                <a:solidFill>
+                  <a:srgbClr val="16233F"/>
+                </a:solidFill>
+              </a:rPr>
+              <a:t>[PREENCHER: FOTO 2 do estudo de caso — rostos e logotipos ocultados]</a:t>
+            </a:r>
+          </a:p>
+        </p:txBody>
+      </p:sp>
+      <p:sp>
+        <p:nvSpPr>
+          <p:cNvPr id="1036" name="Rectangle 1035"/>
+          <p:cNvSpPr/>
+          <p:nvPr/>
+        </p:nvSpPr>
+        <p:spPr>
+          <a:xfrm>
+            <a:off x="17239748" y="16926891"/>
+            <a:ext cx="5768641" cy="4060105"/>
+          </a:xfrm>
+          <a:prstGeom prst="rect">
+            <a:avLst/>
+          </a:prstGeom>
+          <a:solidFill>
+            <a:srgbClr val="FFF2A8"/>
+          </a:solidFill>
+          <a:ln w="38100">
+            <a:solidFill>
+              <a:srgbClr val="B4842A"/>
+            </a:solidFill>
+          </a:ln>
+        </p:spPr>
+        <p:style>
+          <a:lnRef idx="1">
+            <a:schemeClr val="accent1"/>
+          </a:lnRef>
+          <a:fillRef idx="3">
+            <a:schemeClr val="accent1"/>
+          </a:fillRef>
+          <a:effectRef idx="2">
+            <a:schemeClr val="accent1"/>
+          </a:effectRef>
+          <a:fontRef idx="minor">
+            <a:schemeClr val="lt1"/>
+          </a:fontRef>
+        </p:style>
+        <p:txBody>
+          <a:bodyPr rtlCol="0" anchor="ctr" wrap="square"/>
+          <a:lstStyle/>
+          <a:p>
+            <a:pPr algn="ctr"/>
+            <a:r>
+              <a:rPr sz="2800" b="1">
+                <a:solidFill>
+                  <a:srgbClr val="16233F"/>
+                </a:solidFill>
+              </a:rPr>
+              <a:t>[PREENCHER: gráfico real do painel — causas por nível]</a:t>
+            </a:r>
+          </a:p>
+        </p:txBody>
+      </p:sp>
+      <p:sp>
+        <p:nvSpPr>
+          <p:cNvPr id="1037" name="Rectangle 1036"/>
+          <p:cNvSpPr/>
+          <p:nvPr/>
+        </p:nvSpPr>
+        <p:spPr>
+          <a:xfrm>
+            <a:off x="24995633" y="16926891"/>
+            <a:ext cx="5768641" cy="4060106"/>
+          </a:xfrm>
+          <a:prstGeom prst="rect">
+            <a:avLst/>
+          </a:prstGeom>
+          <a:solidFill>
+            <a:srgbClr val="FFF2A8"/>
+          </a:solidFill>
+          <a:ln w="38100">
+            <a:solidFill>
+              <a:srgbClr val="B4842A"/>
+            </a:solidFill>
+          </a:ln>
+        </p:spPr>
+        <p:style>
+          <a:lnRef idx="1">
+            <a:schemeClr val="accent1"/>
+          </a:lnRef>
+          <a:fillRef idx="3">
+            <a:schemeClr val="accent1"/>
+          </a:fillRef>
+          <a:effectRef idx="2">
+            <a:schemeClr val="accent1"/>
+          </a:effectRef>
+          <a:fontRef idx="minor">
+            <a:schemeClr val="lt1"/>
+          </a:fontRef>
+        </p:style>
+        <p:txBody>
+          <a:bodyPr rtlCol="0" anchor="ctr" wrap="square"/>
+          <a:lstStyle/>
+          <a:p>
+            <a:pPr algn="ctr"/>
+            <a:r>
+              <a:rPr sz="2800" b="1">
+                <a:solidFill>
+                  <a:srgbClr val="16233F"/>
+                </a:solidFill>
+              </a:rPr>
+              <a:t>[PREENCHER: gráfico real do painel — indicadores do piloto]</a:t>
+            </a:r>
+          </a:p>
+        </p:txBody>
+      </p:sp>
     </p:spTree>
     <p:extLst>
       <p:ext uri="{BB962C8B-B14F-4D97-AF65-F5344CB8AC3E}">
